--- a/assets/FondueTracker.pptx
+++ b/assets/FondueTracker.pptx
@@ -108,6 +108,11 @@
       </a:defRPr>
     </a:lvl9pPr>
   </p:defaultTextStyle>
+  <p:extLst>
+    <p:ext uri="{EFAFB233-063F-42B5-8137-9DF3F51BA10A}">
+      <p15:sldGuideLst xmlns:p15="http://schemas.microsoft.com/office/powerpoint/2012/main"/>
+    </p:ext>
+  </p:extLst>
 </p:presentation>
 </file>
 
@@ -260,7 +265,7 @@
           <a:p>
             <a:fld id="{98CEF613-A959-47C6-AE7E-9FB23575995D}" type="datetimeFigureOut">
               <a:rPr lang="en-CH" smtClean="0"/>
-              <a:t>31/10/2026</a:t>
+              <a:t>01/11/2026</a:t>
             </a:fld>
             <a:endParaRPr lang="en-CH"/>
           </a:p>
@@ -460,7 +465,7 @@
           <a:p>
             <a:fld id="{98CEF613-A959-47C6-AE7E-9FB23575995D}" type="datetimeFigureOut">
               <a:rPr lang="en-CH" smtClean="0"/>
-              <a:t>31/10/2026</a:t>
+              <a:t>01/11/2026</a:t>
             </a:fld>
             <a:endParaRPr lang="en-CH"/>
           </a:p>
@@ -670,7 +675,7 @@
           <a:p>
             <a:fld id="{98CEF613-A959-47C6-AE7E-9FB23575995D}" type="datetimeFigureOut">
               <a:rPr lang="en-CH" smtClean="0"/>
-              <a:t>31/10/2026</a:t>
+              <a:t>01/11/2026</a:t>
             </a:fld>
             <a:endParaRPr lang="en-CH"/>
           </a:p>
@@ -870,7 +875,7 @@
           <a:p>
             <a:fld id="{98CEF613-A959-47C6-AE7E-9FB23575995D}" type="datetimeFigureOut">
               <a:rPr lang="en-CH" smtClean="0"/>
-              <a:t>31/10/2026</a:t>
+              <a:t>01/11/2026</a:t>
             </a:fld>
             <a:endParaRPr lang="en-CH"/>
           </a:p>
@@ -1146,7 +1151,7 @@
           <a:p>
             <a:fld id="{98CEF613-A959-47C6-AE7E-9FB23575995D}" type="datetimeFigureOut">
               <a:rPr lang="en-CH" smtClean="0"/>
-              <a:t>31/10/2026</a:t>
+              <a:t>01/11/2026</a:t>
             </a:fld>
             <a:endParaRPr lang="en-CH"/>
           </a:p>
@@ -1414,7 +1419,7 @@
           <a:p>
             <a:fld id="{98CEF613-A959-47C6-AE7E-9FB23575995D}" type="datetimeFigureOut">
               <a:rPr lang="en-CH" smtClean="0"/>
-              <a:t>31/10/2026</a:t>
+              <a:t>01/11/2026</a:t>
             </a:fld>
             <a:endParaRPr lang="en-CH"/>
           </a:p>
@@ -1829,7 +1834,7 @@
           <a:p>
             <a:fld id="{98CEF613-A959-47C6-AE7E-9FB23575995D}" type="datetimeFigureOut">
               <a:rPr lang="en-CH" smtClean="0"/>
-              <a:t>31/10/2026</a:t>
+              <a:t>01/11/2026</a:t>
             </a:fld>
             <a:endParaRPr lang="en-CH"/>
           </a:p>
@@ -1971,7 +1976,7 @@
           <a:p>
             <a:fld id="{98CEF613-A959-47C6-AE7E-9FB23575995D}" type="datetimeFigureOut">
               <a:rPr lang="en-CH" smtClean="0"/>
-              <a:t>31/10/2026</a:t>
+              <a:t>01/11/2026</a:t>
             </a:fld>
             <a:endParaRPr lang="en-CH"/>
           </a:p>
@@ -2084,7 +2089,7 @@
           <a:p>
             <a:fld id="{98CEF613-A959-47C6-AE7E-9FB23575995D}" type="datetimeFigureOut">
               <a:rPr lang="en-CH" smtClean="0"/>
-              <a:t>31/10/2026</a:t>
+              <a:t>01/11/2026</a:t>
             </a:fld>
             <a:endParaRPr lang="en-CH"/>
           </a:p>
@@ -2397,7 +2402,7 @@
           <a:p>
             <a:fld id="{98CEF613-A959-47C6-AE7E-9FB23575995D}" type="datetimeFigureOut">
               <a:rPr lang="en-CH" smtClean="0"/>
-              <a:t>31/10/2026</a:t>
+              <a:t>01/11/2026</a:t>
             </a:fld>
             <a:endParaRPr lang="en-CH"/>
           </a:p>
@@ -2686,7 +2691,7 @@
           <a:p>
             <a:fld id="{98CEF613-A959-47C6-AE7E-9FB23575995D}" type="datetimeFigureOut">
               <a:rPr lang="en-CH" smtClean="0"/>
-              <a:t>31/10/2026</a:t>
+              <a:t>01/11/2026</a:t>
             </a:fld>
             <a:endParaRPr lang="en-CH"/>
           </a:p>
@@ -2929,7 +2934,7 @@
           <a:p>
             <a:fld id="{98CEF613-A959-47C6-AE7E-9FB23575995D}" type="datetimeFigureOut">
               <a:rPr lang="en-CH" smtClean="0"/>
-              <a:t>31/10/2026</a:t>
+              <a:t>01/11/2026</a:t>
             </a:fld>
             <a:endParaRPr lang="en-CH"/>
           </a:p>
@@ -3829,8 +3834,8 @@
         </p:nvSpPr>
         <p:spPr>
           <a:xfrm>
-            <a:off x="3864897" y="2202153"/>
-            <a:ext cx="3649086" cy="1775878"/>
+            <a:off x="3801035" y="2202153"/>
+            <a:ext cx="3608394" cy="1284481"/>
           </a:xfrm>
           <a:custGeom>
             <a:avLst/>
@@ -3904,7 +3909,11 @@
             </a:pathLst>
           </a:custGeom>
           <a:noFill/>
-          <a:ln w="76200"/>
+          <a:ln w="76200">
+            <a:solidFill>
+              <a:srgbClr val="3D2D23"/>
+            </a:solidFill>
+          </a:ln>
         </p:spPr>
         <p:style>
           <a:lnRef idx="2">
@@ -3980,37 +3989,6 @@
           <a:xfrm>
             <a:off x="2368606" y="1316335"/>
             <a:ext cx="1862370" cy="1441603"/>
-          </a:xfrm>
-          <a:prstGeom prst="rect">
-            <a:avLst/>
-          </a:prstGeom>
-        </p:spPr>
-      </p:pic>
-      <p:pic>
-        <p:nvPicPr>
-          <p:cNvPr id="24" name="Picture 23">
-            <a:extLst>
-              <a:ext uri="{FF2B5EF4-FFF2-40B4-BE49-F238E27FC236}">
-                <a16:creationId xmlns:a16="http://schemas.microsoft.com/office/drawing/2014/main" id="{18A5F961-D741-535D-A761-707ABDE21D9F}"/>
-              </a:ext>
-            </a:extLst>
-          </p:cNvPr>
-          <p:cNvPicPr>
-            <a:picLocks noChangeAspect="1"/>
-          </p:cNvPicPr>
-          <p:nvPr/>
-        </p:nvPicPr>
-        <p:blipFill>
-          <a:blip r:embed="rId4"/>
-          <a:srcRect l="20725" t="6518" r="10826" b="15533"/>
-          <a:stretch>
-            <a:fillRect/>
-          </a:stretch>
-        </p:blipFill>
-        <p:spPr>
-          <a:xfrm>
-            <a:off x="1098178" y="2759650"/>
-            <a:ext cx="5561702" cy="6333638"/>
           </a:xfrm>
           <a:prstGeom prst="rect">
             <a:avLst/>
@@ -4145,21 +4123,200 @@
           <p:nvPr/>
         </p:nvPicPr>
         <p:blipFill>
-          <a:blip r:embed="rId5">
+          <a:blip r:embed="rId4">
             <a:extLst>
               <a:ext uri="{28A0092B-C50C-407E-A947-70E740481C1C}">
                 <a14:useLocalDpi xmlns:a14="http://schemas.microsoft.com/office/drawing/2010/main" val="0"/>
               </a:ext>
             </a:extLst>
           </a:blip>
+          <a:srcRect l="25982"/>
           <a:stretch>
             <a:fillRect/>
           </a:stretch>
         </p:blipFill>
         <p:spPr>
           <a:xfrm>
-            <a:off x="5123676" y="-105162"/>
-            <a:ext cx="7068324" cy="7068324"/>
+            <a:off x="6960182" y="-105162"/>
+            <a:ext cx="5231817" cy="7068324"/>
+          </a:xfrm>
+          <a:prstGeom prst="rect">
+            <a:avLst/>
+          </a:prstGeom>
+        </p:spPr>
+      </p:pic>
+      <p:sp>
+        <p:nvSpPr>
+          <p:cNvPr id="8" name="Free-form: Shape 7">
+            <a:extLst>
+              <a:ext uri="{FF2B5EF4-FFF2-40B4-BE49-F238E27FC236}">
+                <a16:creationId xmlns:a16="http://schemas.microsoft.com/office/drawing/2014/main" id="{5F807B45-BDDA-83D3-9A81-7BD53F40D77F}"/>
+              </a:ext>
+            </a:extLst>
+          </p:cNvPr>
+          <p:cNvSpPr/>
+          <p:nvPr/>
+        </p:nvSpPr>
+        <p:spPr>
+          <a:xfrm>
+            <a:off x="4411864" y="3905906"/>
+            <a:ext cx="3064701" cy="1088013"/>
+          </a:xfrm>
+          <a:custGeom>
+            <a:avLst/>
+            <a:gdLst>
+              <a:gd name="csX0" fmla="*/ 3064701 w 3064701"/>
+              <a:gd name="csY0" fmla="*/ 74423 h 1088013"/>
+              <a:gd name="csX1" fmla="*/ 2248912 w 3064701"/>
+              <a:gd name="csY1" fmla="*/ 217859 h 1088013"/>
+              <a:gd name="csX2" fmla="*/ 2311665 w 3064701"/>
+              <a:gd name="csY2" fmla="*/ 1087435 h 1088013"/>
+              <a:gd name="csX3" fmla="*/ 213924 w 3064701"/>
+              <a:gd name="csY3" fmla="*/ 74423 h 1088013"/>
+              <a:gd name="csX4" fmla="*/ 178065 w 3064701"/>
+              <a:gd name="csY4" fmla="*/ 155106 h 1088013"/>
+            </a:gdLst>
+            <a:ahLst/>
+            <a:cxnLst>
+              <a:cxn ang="0">
+                <a:pos x="csX0" y="csY0"/>
+              </a:cxn>
+              <a:cxn ang="0">
+                <a:pos x="csX1" y="csY1"/>
+              </a:cxn>
+              <a:cxn ang="0">
+                <a:pos x="csX2" y="csY2"/>
+              </a:cxn>
+              <a:cxn ang="0">
+                <a:pos x="csX3" y="csY3"/>
+              </a:cxn>
+              <a:cxn ang="0">
+                <a:pos x="csX4" y="csY4"/>
+              </a:cxn>
+            </a:cxnLst>
+            <a:rect l="l" t="t" r="r" b="b"/>
+            <a:pathLst>
+              <a:path w="3064701" h="1088013">
+                <a:moveTo>
+                  <a:pt x="3064701" y="74423"/>
+                </a:moveTo>
+                <a:cubicBezTo>
+                  <a:pt x="2719559" y="61723"/>
+                  <a:pt x="2374418" y="49024"/>
+                  <a:pt x="2248912" y="217859"/>
+                </a:cubicBezTo>
+                <a:cubicBezTo>
+                  <a:pt x="2123406" y="386694"/>
+                  <a:pt x="2650830" y="1111341"/>
+                  <a:pt x="2311665" y="1087435"/>
+                </a:cubicBezTo>
+                <a:cubicBezTo>
+                  <a:pt x="1972500" y="1063529"/>
+                  <a:pt x="569524" y="229811"/>
+                  <a:pt x="213924" y="74423"/>
+                </a:cubicBezTo>
+                <a:cubicBezTo>
+                  <a:pt x="-141676" y="-80965"/>
+                  <a:pt x="18194" y="37070"/>
+                  <a:pt x="178065" y="155106"/>
+                </a:cubicBezTo>
+              </a:path>
+            </a:pathLst>
+          </a:custGeom>
+          <a:noFill/>
+          <a:ln w="76200">
+            <a:solidFill>
+              <a:srgbClr val="3D2D23"/>
+            </a:solidFill>
+          </a:ln>
+        </p:spPr>
+        <p:style>
+          <a:lnRef idx="2">
+            <a:schemeClr val="accent1">
+              <a:shade val="15000"/>
+            </a:schemeClr>
+          </a:lnRef>
+          <a:fillRef idx="1">
+            <a:schemeClr val="accent1"/>
+          </a:fillRef>
+          <a:effectRef idx="0">
+            <a:schemeClr val="accent1"/>
+          </a:effectRef>
+          <a:fontRef idx="minor">
+            <a:schemeClr val="lt1"/>
+          </a:fontRef>
+        </p:style>
+        <p:txBody>
+          <a:bodyPr rtlCol="0" anchor="ctr"/>
+          <a:lstStyle/>
+          <a:p>
+            <a:pPr algn="ctr"/>
+            <a:endParaRPr lang="en-CH"/>
+          </a:p>
+        </p:txBody>
+      </p:sp>
+      <p:pic>
+        <p:nvPicPr>
+          <p:cNvPr id="6" name="Picture 5">
+            <a:extLst>
+              <a:ext uri="{FF2B5EF4-FFF2-40B4-BE49-F238E27FC236}">
+                <a16:creationId xmlns:a16="http://schemas.microsoft.com/office/drawing/2014/main" id="{4E83016A-1BDD-A8AC-91D9-99728A371631}"/>
+              </a:ext>
+            </a:extLst>
+          </p:cNvPr>
+          <p:cNvPicPr>
+            <a:picLocks noChangeAspect="1"/>
+          </p:cNvPicPr>
+          <p:nvPr/>
+        </p:nvPicPr>
+        <p:blipFill>
+          <a:blip r:embed="rId5">
+            <a:extLst>
+              <a:ext uri="{28A0092B-C50C-407E-A947-70E740481C1C}">
+                <a14:useLocalDpi xmlns:a14="http://schemas.microsoft.com/office/drawing/2010/main" val="0"/>
+              </a:ext>
+            </a:extLst>
+          </a:blip>
+          <a:srcRect l="25138" t="45012" r="31854" b="16211"/>
+          <a:stretch>
+            <a:fillRect/>
+          </a:stretch>
+        </p:blipFill>
+        <p:spPr>
+          <a:xfrm rot="5216011">
+            <a:off x="3087992" y="3545740"/>
+            <a:ext cx="2048239" cy="1846731"/>
+          </a:xfrm>
+          <a:prstGeom prst="rect">
+            <a:avLst/>
+          </a:prstGeom>
+        </p:spPr>
+      </p:pic>
+      <p:pic>
+        <p:nvPicPr>
+          <p:cNvPr id="24" name="Picture 23">
+            <a:extLst>
+              <a:ext uri="{FF2B5EF4-FFF2-40B4-BE49-F238E27FC236}">
+                <a16:creationId xmlns:a16="http://schemas.microsoft.com/office/drawing/2014/main" id="{18A5F961-D741-535D-A761-707ABDE21D9F}"/>
+              </a:ext>
+            </a:extLst>
+          </p:cNvPr>
+          <p:cNvPicPr>
+            <a:picLocks noChangeAspect="1"/>
+          </p:cNvPicPr>
+          <p:nvPr/>
+        </p:nvPicPr>
+        <p:blipFill>
+          <a:blip r:embed="rId6"/>
+          <a:srcRect l="20725" t="6518" r="10826" b="15533"/>
+          <a:stretch>
+            <a:fillRect/>
+          </a:stretch>
+        </p:blipFill>
+        <p:spPr>
+          <a:xfrm>
+            <a:off x="1098178" y="2759650"/>
+            <a:ext cx="5561702" cy="6333638"/>
           </a:xfrm>
           <a:prstGeom prst="rect">
             <a:avLst/>
@@ -4176,13 +4333,13 @@
   <p:clrMapOvr>
     <a:masterClrMapping/>
   </p:clrMapOvr>
-  <mc:AlternateContent xmlns:mc="http://schemas.openxmlformats.org/markup-compatibility/2006">
-    <mc:Choice xmlns:p159="http://schemas.microsoft.com/office/powerpoint/2015/09/main" Requires="p159">
+  <mc:AlternateContent xmlns:mc="http://schemas.openxmlformats.org/markup-compatibility/2006" xmlns:p159="http://schemas.microsoft.com/office/powerpoint/2015/09/main">
+    <mc:Choice Requires="p159">
       <p:transition xmlns:p14="http://schemas.microsoft.com/office/powerpoint/2010/main" spd="slow" p14:dur="2000">
         <p159:morph option="byObject"/>
       </p:transition>
     </mc:Choice>
-    <mc:Fallback>
+    <mc:Fallback xmlns="">
       <p:transition spd="slow">
         <p:fade/>
       </p:transition>
@@ -4567,13 +4724,13 @@
   <p:clrMapOvr>
     <a:masterClrMapping/>
   </p:clrMapOvr>
-  <mc:AlternateContent xmlns:mc="http://schemas.openxmlformats.org/markup-compatibility/2006">
-    <mc:Choice xmlns:p159="http://schemas.microsoft.com/office/powerpoint/2015/09/main" Requires="p159">
+  <mc:AlternateContent xmlns:mc="http://schemas.openxmlformats.org/markup-compatibility/2006" xmlns:p159="http://schemas.microsoft.com/office/powerpoint/2015/09/main">
+    <mc:Choice Requires="p159">
       <p:transition xmlns:p14="http://schemas.microsoft.com/office/powerpoint/2010/main" spd="slow" p14:dur="2000">
         <p159:morph option="byObject"/>
       </p:transition>
     </mc:Choice>
-    <mc:Fallback>
+    <mc:Fallback xmlns="">
       <p:transition spd="slow">
         <p:fade/>
       </p:transition>
@@ -4834,13 +4991,13 @@
   <p:clrMapOvr>
     <a:masterClrMapping/>
   </p:clrMapOvr>
-  <mc:AlternateContent xmlns:mc="http://schemas.openxmlformats.org/markup-compatibility/2006">
-    <mc:Choice xmlns:p159="http://schemas.microsoft.com/office/powerpoint/2015/09/main" Requires="p159">
+  <mc:AlternateContent xmlns:mc="http://schemas.openxmlformats.org/markup-compatibility/2006" xmlns:p159="http://schemas.microsoft.com/office/powerpoint/2015/09/main">
+    <mc:Choice Requires="p159">
       <p:transition xmlns:p14="http://schemas.microsoft.com/office/powerpoint/2010/main" spd="slow" p14:dur="2000">
         <p159:morph option="byObject"/>
       </p:transition>
     </mc:Choice>
-    <mc:Fallback>
+    <mc:Fallback xmlns="">
       <p:transition spd="slow">
         <p:fade/>
       </p:transition>
